--- a/第5回_Multi-Head_Attention/excel_multi_head_attention_slides.pptx
+++ b/第5回_Multi-Head_Attention/excel_multi_head_attention_slides.pptx
@@ -10281,7 +10281,7 @@
         </p:nvSpPr>
         <p:spPr>
           <a:xfrm>
-            <a:off x="4572000" y="1417320"/>
+            <a:off x="4572000" y="2057400"/>
             <a:ext cx="2651760" cy="914400"/>
           </a:xfrm>
           <a:prstGeom prst="roundRect">
@@ -10351,7 +10351,7 @@
         </p:nvSpPr>
         <p:spPr>
           <a:xfrm>
-            <a:off x="4572000" y="2606040"/>
+            <a:off x="4572000" y="2926080"/>
             <a:ext cx="2651760" cy="914400"/>
           </a:xfrm>
           <a:prstGeom prst="roundRect">
@@ -10421,7 +10421,7 @@
         </p:nvCxnSpPr>
         <p:spPr>
           <a:xfrm>
-            <a:off x="7269480" y="1920240"/>
+            <a:off x="7269480" y="2560320"/>
             <a:ext cx="731520" cy="365760"/>
           </a:xfrm>
           <a:prstGeom prst="line">
@@ -10456,7 +10456,7 @@
         </p:nvCxnSpPr>
         <p:spPr>
           <a:xfrm flipV="1">
-            <a:off x="7269480" y="2651760"/>
+            <a:off x="7269480" y="2971800"/>
             <a:ext cx="731520" cy="411480"/>
           </a:xfrm>
           <a:prstGeom prst="line">
@@ -10491,7 +10491,7 @@
         </p:nvSpPr>
         <p:spPr>
           <a:xfrm>
-            <a:off x="8001000" y="2011680"/>
+            <a:off x="8001000" y="2651760"/>
             <a:ext cx="2788920" cy="1051560"/>
           </a:xfrm>
           <a:prstGeom prst="roundRect">

--- a/第5回_Multi-Head_Attention/excel_multi_head_attention_slides.pptx
+++ b/第5回_Multi-Head_Attention/excel_multi_head_attention_slides.pptx
@@ -3210,7 +3210,7 @@
         <p:spPr>
           <a:xfrm>
             <a:off x="640080" y="868680"/>
-            <a:ext cx="6858000" cy="594360"/>
+            <a:ext cx="6949440" cy="594360"/>
           </a:xfrm>
           <a:prstGeom prst="rect">
             <a:avLst/>
@@ -3223,15 +3223,15 @@
           </a:bodyPr>
           <a:lstStyle/>
           <a:p>
-            <a:pPr algn="r"/>
-            <a:r>
-              <a:rPr sz="850">
-                <a:solidFill>
-                  <a:srgbClr val="64748B"/>
-                </a:solidFill>
-                <a:latin typeface="Yu Gothic"/>
-              </a:rPr>
-              <a:t>Excelで体験する言語モデルのしくみ | 第5回 | 1</a:t>
+            <a:pPr algn="l"/>
+            <a:r>
+              <a:rPr sz="2500" b="1">
+                <a:solidFill>
+                  <a:srgbClr val="24324B"/>
+                </a:solidFill>
+                <a:latin typeface="Yu Gothic"/>
+              </a:rPr>
+              <a:t>Excelで体験する 言語モデルのしくみ</a:t>
             </a:r>
           </a:p>
         </p:txBody>
@@ -3279,7 +3279,7 @@
         <p:spPr>
           <a:xfrm>
             <a:off x="685800" y="2148840"/>
-            <a:ext cx="5760720" cy="731520"/>
+            <a:ext cx="5806440" cy="731520"/>
           </a:xfrm>
           <a:prstGeom prst="rect">
             <a:avLst/>
